--- a/m5/diapositivos/sessao-06-m5-f10.pptx
+++ b/m5/diapositivos/sessao-06-m5-f10.pptx
@@ -3895,7 +3895,109 @@
                 <a:ea typeface="Georgia" pitchFamily="34" charset="-122"/>
                 <a:cs typeface="Georgia" pitchFamily="34" charset="-120"/>
               </a:rPr>
-              <a:t>A casa que os Maias vieram habitar em Lisboa, no outono de 1875, era conhecida na visinhança da rua de S. Francisco de Paula, e em todo o bairro das Janellas Verdes, pela casa do Ramalhete ou simplesmente o Ramalhete. Apesar d'este fresco nome de vivenda campestre, o Ramalhete, sombrio casarão de paredes severas, com um renque de estreitas varandas de ferro no primeiro andar, e por cima uma timida fila de janellinhas abrigadas á beira do telhado, tinha o aspecto tristonho de Residencia Ecclesiastica que competia a uma edificação do reinado da sr.^a D. Maria I: com uma sineta e com uma cruz no topo assimilhar-se-hia a um Collegio de Jesuitas. O nome de Ramalhete provinha de certo d'um revestimento quadrado de azulejos fazendo painel no logar heraldico do Escudo d'Armas, que nunca chegara a ser collocado, e representando um grande ramo de girasoes atado por uma fita onde se distinguiam letras e numeros d'uma data.</a:t>
+              <a:t>A casa que os Maias vieram habitar em Lisboa, no outono de 1875, era conhecida na visinhança da rua de S. Francisco de Paula, e em todo o bairro das Janellas Verdes, pela </a:t>
+            </a:r>
+            <a:pPr indent="0" marL="0">
+              <a:lnSpc>
+                <a:spcPct val="125000"/>
+              </a:lnSpc>
+              <a:buNone/>
+            </a:pPr>
+            <a:r>
+              <a:rPr lang="en-US" sz="2200" i="1" dirty="0">
+                <a:solidFill>
+                  <a:srgbClr val="F2F0EA"/>
+                </a:solidFill>
+                <a:latin typeface="Georgia" pitchFamily="34" charset="0"/>
+                <a:ea typeface="Georgia" pitchFamily="34" charset="-122"/>
+                <a:cs typeface="Georgia" pitchFamily="34" charset="-120"/>
+              </a:rPr>
+              <a:t>casa do Ramalhete</a:t>
+            </a:r>
+            <a:pPr indent="0" marL="0">
+              <a:lnSpc>
+                <a:spcPct val="125000"/>
+              </a:lnSpc>
+              <a:buNone/>
+            </a:pPr>
+            <a:r>
+              <a:rPr lang="en-US" sz="2200" dirty="0">
+                <a:solidFill>
+                  <a:srgbClr val="F2F0EA"/>
+                </a:solidFill>
+                <a:latin typeface="Georgia" pitchFamily="34" charset="0"/>
+                <a:ea typeface="Georgia" pitchFamily="34" charset="-122"/>
+                <a:cs typeface="Georgia" pitchFamily="34" charset="-120"/>
+              </a:rPr>
+              <a:t> ou simplesmente o </a:t>
+            </a:r>
+            <a:pPr indent="0" marL="0">
+              <a:lnSpc>
+                <a:spcPct val="125000"/>
+              </a:lnSpc>
+              <a:buNone/>
+            </a:pPr>
+            <a:r>
+              <a:rPr lang="en-US" sz="2200" i="1" dirty="0">
+                <a:solidFill>
+                  <a:srgbClr val="F2F0EA"/>
+                </a:solidFill>
+                <a:latin typeface="Georgia" pitchFamily="34" charset="0"/>
+                <a:ea typeface="Georgia" pitchFamily="34" charset="-122"/>
+                <a:cs typeface="Georgia" pitchFamily="34" charset="-120"/>
+              </a:rPr>
+              <a:t>Ramalhete</a:t>
+            </a:r>
+            <a:pPr indent="0" marL="0">
+              <a:lnSpc>
+                <a:spcPct val="125000"/>
+              </a:lnSpc>
+              <a:buNone/>
+            </a:pPr>
+            <a:r>
+              <a:rPr lang="en-US" sz="2200" dirty="0">
+                <a:solidFill>
+                  <a:srgbClr val="F2F0EA"/>
+                </a:solidFill>
+                <a:latin typeface="Georgia" pitchFamily="34" charset="0"/>
+                <a:ea typeface="Georgia" pitchFamily="34" charset="-122"/>
+                <a:cs typeface="Georgia" pitchFamily="34" charset="-120"/>
+              </a:rPr>
+              <a:t>. Apesar d'este fresco nome de vivenda campestre, o </a:t>
+            </a:r>
+            <a:pPr indent="0" marL="0">
+              <a:lnSpc>
+                <a:spcPct val="125000"/>
+              </a:lnSpc>
+              <a:buNone/>
+            </a:pPr>
+            <a:r>
+              <a:rPr lang="en-US" sz="2200" i="1" dirty="0">
+                <a:solidFill>
+                  <a:srgbClr val="F2F0EA"/>
+                </a:solidFill>
+                <a:latin typeface="Georgia" pitchFamily="34" charset="0"/>
+                <a:ea typeface="Georgia" pitchFamily="34" charset="-122"/>
+                <a:cs typeface="Georgia" pitchFamily="34" charset="-120"/>
+              </a:rPr>
+              <a:t>Ramalhete</a:t>
+            </a:r>
+            <a:pPr indent="0" marL="0">
+              <a:lnSpc>
+                <a:spcPct val="125000"/>
+              </a:lnSpc>
+              <a:buNone/>
+            </a:pPr>
+            <a:r>
+              <a:rPr lang="en-US" sz="2200" dirty="0">
+                <a:solidFill>
+                  <a:srgbClr val="F2F0EA"/>
+                </a:solidFill>
+                <a:latin typeface="Georgia" pitchFamily="34" charset="0"/>
+                <a:ea typeface="Georgia" pitchFamily="34" charset="-122"/>
+                <a:cs typeface="Georgia" pitchFamily="34" charset="-120"/>
+              </a:rPr>
+              <a:t>, sombrio casarão de paredes severas, com um renque de estreitas varandas de ferro no primeiro andar, e por cima uma timida fila de janellinhas abrigadas á beira do telhado, tinha o aspecto tristonho de Residencia Ecclesiastica que competia a uma edificação do reinado da sr.^a D. Maria I: com uma sineta e com uma cruz no topo assimilhar-se-hia a um Collegio de Jesuitas. O nome de Ramalhete provinha de certo d'um revestimento quadrado de azulejos fazendo painel no logar heraldico do Escudo d'Armas, que nunca chegara a ser collocado, e representando um grande ramo de girasoes atado por uma fita onde se distinguiam letras e numeros d'uma data.</a:t>
             </a:r>
             <a:endParaRPr lang="en-US" sz="2200" dirty="0"/>
           </a:p>
@@ -3936,7 +4038,35 @@
                 <a:ea typeface="Arial" pitchFamily="34" charset="-122"/>
                 <a:cs typeface="Arial" pitchFamily="34" charset="-120"/>
               </a:rPr>
-              <a:t>Eça de Queirós, Os Maias (1888), cap. I, grafia da edição.</a:t>
+              <a:t>Eça de Queirós, </a:t>
+            </a:r>
+            <a:pPr indent="0" marL="0">
+              <a:buNone/>
+            </a:pPr>
+            <a:r>
+              <a:rPr lang="en-US" sz="1200" i="1" dirty="0">
+                <a:solidFill>
+                  <a:srgbClr val="A9A79F"/>
+                </a:solidFill>
+                <a:latin typeface="Arial" pitchFamily="34" charset="0"/>
+                <a:ea typeface="Arial" pitchFamily="34" charset="-122"/>
+                <a:cs typeface="Arial" pitchFamily="34" charset="-120"/>
+              </a:rPr>
+              <a:t>Os Maias</a:t>
+            </a:r>
+            <a:pPr indent="0" marL="0">
+              <a:buNone/>
+            </a:pPr>
+            <a:r>
+              <a:rPr lang="en-US" sz="1200" dirty="0">
+                <a:solidFill>
+                  <a:srgbClr val="A9A79F"/>
+                </a:solidFill>
+                <a:latin typeface="Arial" pitchFamily="34" charset="0"/>
+                <a:ea typeface="Arial" pitchFamily="34" charset="-122"/>
+                <a:cs typeface="Arial" pitchFamily="34" charset="-120"/>
+              </a:rPr>
+              <a:t> (1888), cap. I, grafia da edição.</a:t>
             </a:r>
             <a:endParaRPr lang="en-US" sz="1200" dirty="0"/>
           </a:p>
@@ -4215,7 +4345,41 @@
                 <a:ea typeface="Georgia" pitchFamily="34" charset="-122"/>
                 <a:cs typeface="Georgia" pitchFamily="34" charset="-120"/>
               </a:rPr>
-              <a:t>Longos annos o Ramalhete permanecera deshabitado, com teias d'aranha pelas grades dos postigos terreos, e cobrindo-se de tons de ruina. Em 1858 Monsenhor Buccarini, Nuncio de S. Santidade, visitara-o com idéa d'installar lá a Nunciatura, seduzido pela gravidade clerical do edificio e pela paz dormente do bairro: e o interior do casarão agradara-lhe tambem, com a sua disposição apalaçada, os tectos apainelados, as paredes cobertas de frescos onde já desmaiavam as rosas das grinaldas e as faces dos Cupidinhos. Mas Monsenhor, com os seus habitos de rico prelado romano, necessitava na sua vivenda os arvoredos e as agoas d'um jardim de luxo: e o Ramalhete possuia apenas, ao fundo d'um terraço de tijolo, um pobre quintal inculto, abandonado ás hervas bravas, com um cypreste, um cedro, uma cascatasinha secca, um tanque entulhado, e uma estatua de marmore (onde Monsenhor reconheceu logo Venus Citherêa) ennegrecendo a um canto na lenta humidade das ramagens silvestres. Além d'isso, a renda que pedio o velho Villaça, procurador dos Maias, pareceu tão exagerada a Monsenhor, que lhe perguntou sorrindo se ainda julgava a Egreja nos tempos de Leão X. Villaça respondeu — que tambem a nobreza não estava nos tempos do sr. D. João V. E o Ramalhete continuou deshabitado.</a:t>
+              <a:t>Longos annos o Ramalhete permanecera deshabitado, com teias d'aranha pelas grades dos postigos terreos, e cobrindo-se de tons de ruina. Em 1858 Monsenhor Buccarini, Nuncio de S. Santidade, visitara-o com idéa d'installar lá a Nunciatura, seduzido pela gravidade clerical do edificio e pela paz dormente do bairro: e o interior do casarão agradara-lhe tambem, com a sua disposição apalaçada, os tectos apainelados, as paredes cobertas de </a:t>
+            </a:r>
+            <a:pPr indent="0" marL="0">
+              <a:lnSpc>
+                <a:spcPct val="125000"/>
+              </a:lnSpc>
+              <a:buNone/>
+            </a:pPr>
+            <a:r>
+              <a:rPr lang="en-US" sz="2200" i="1" dirty="0">
+                <a:solidFill>
+                  <a:srgbClr val="F2F0EA"/>
+                </a:solidFill>
+                <a:latin typeface="Georgia" pitchFamily="34" charset="0"/>
+                <a:ea typeface="Georgia" pitchFamily="34" charset="-122"/>
+                <a:cs typeface="Georgia" pitchFamily="34" charset="-120"/>
+              </a:rPr>
+              <a:t>frescos</a:t>
+            </a:r>
+            <a:pPr indent="0" marL="0">
+              <a:lnSpc>
+                <a:spcPct val="125000"/>
+              </a:lnSpc>
+              <a:buNone/>
+            </a:pPr>
+            <a:r>
+              <a:rPr lang="en-US" sz="2200" dirty="0">
+                <a:solidFill>
+                  <a:srgbClr val="F2F0EA"/>
+                </a:solidFill>
+                <a:latin typeface="Georgia" pitchFamily="34" charset="0"/>
+                <a:ea typeface="Georgia" pitchFamily="34" charset="-122"/>
+                <a:cs typeface="Georgia" pitchFamily="34" charset="-120"/>
+              </a:rPr>
+              <a:t> onde já desmaiavam as rosas das grinaldas e as faces dos Cupidinhos. Mas Monsenhor, com os seus habitos de rico prelado romano, necessitava na sua vivenda os arvoredos e as agoas d'um jardim de luxo: e o Ramalhete possuia apenas, ao fundo d'um terraço de tijolo, um pobre quintal inculto, abandonado ás hervas bravas, com um cypreste, um cedro, uma cascatasinha secca, um tanque entulhado, e uma estatua de marmore (onde Monsenhor reconheceu logo Venus Citherêa) ennegrecendo a um canto na lenta humidade das ramagens silvestres. Além d'isso, a renda que pedio o velho Villaça, procurador dos Maias, pareceu tão exagerada a Monsenhor, que lhe perguntou sorrindo se ainda julgava a Egreja nos tempos de Leão X. Villaça respondeu — que tambem a nobreza não estava nos tempos do sr. D. João V. E o Ramalhete continuou deshabitado.</a:t>
             </a:r>
             <a:endParaRPr lang="en-US" sz="2200" dirty="0"/>
           </a:p>
@@ -4256,7 +4420,35 @@
                 <a:ea typeface="Arial" pitchFamily="34" charset="-122"/>
                 <a:cs typeface="Arial" pitchFamily="34" charset="-120"/>
               </a:rPr>
-              <a:t>Eça de Queirós, Os Maias (1888), cap. I, grafia da edição.</a:t>
+              <a:t>Eça de Queirós, </a:t>
+            </a:r>
+            <a:pPr indent="0" marL="0">
+              <a:buNone/>
+            </a:pPr>
+            <a:r>
+              <a:rPr lang="en-US" sz="1200" i="1" dirty="0">
+                <a:solidFill>
+                  <a:srgbClr val="A9A79F"/>
+                </a:solidFill>
+                <a:latin typeface="Arial" pitchFamily="34" charset="0"/>
+                <a:ea typeface="Arial" pitchFamily="34" charset="-122"/>
+                <a:cs typeface="Arial" pitchFamily="34" charset="-120"/>
+              </a:rPr>
+              <a:t>Os Maias</a:t>
+            </a:r>
+            <a:pPr indent="0" marL="0">
+              <a:buNone/>
+            </a:pPr>
+            <a:r>
+              <a:rPr lang="en-US" sz="1200" dirty="0">
+                <a:solidFill>
+                  <a:srgbClr val="A9A79F"/>
+                </a:solidFill>
+                <a:latin typeface="Arial" pitchFamily="34" charset="0"/>
+                <a:ea typeface="Arial" pitchFamily="34" charset="-122"/>
+                <a:cs typeface="Arial" pitchFamily="34" charset="-120"/>
+              </a:rPr>
+              <a:t> (1888), cap. I, grafia da edição.</a:t>
             </a:r>
             <a:endParaRPr lang="en-US" sz="1200" dirty="0"/>
           </a:p>
@@ -4616,7 +4808,35 @@
                 <a:ea typeface="Arial" pitchFamily="34" charset="-122"/>
                 <a:cs typeface="Arial" pitchFamily="34" charset="-120"/>
               </a:rPr>
-              <a:t>Eça de Queirós, Os Maias (1888), último capítulo, grafia da edição.</a:t>
+              <a:t>Eça de Queirós, </a:t>
+            </a:r>
+            <a:pPr indent="0" marL="0">
+              <a:buNone/>
+            </a:pPr>
+            <a:r>
+              <a:rPr lang="en-US" sz="1200" i="1" dirty="0">
+                <a:solidFill>
+                  <a:srgbClr val="A9A79F"/>
+                </a:solidFill>
+                <a:latin typeface="Arial" pitchFamily="34" charset="0"/>
+                <a:ea typeface="Arial" pitchFamily="34" charset="-122"/>
+                <a:cs typeface="Arial" pitchFamily="34" charset="-120"/>
+              </a:rPr>
+              <a:t>Os Maias</a:t>
+            </a:r>
+            <a:pPr indent="0" marL="0">
+              <a:buNone/>
+            </a:pPr>
+            <a:r>
+              <a:rPr lang="en-US" sz="1200" dirty="0">
+                <a:solidFill>
+                  <a:srgbClr val="A9A79F"/>
+                </a:solidFill>
+                <a:latin typeface="Arial" pitchFamily="34" charset="0"/>
+                <a:ea typeface="Arial" pitchFamily="34" charset="-122"/>
+                <a:cs typeface="Arial" pitchFamily="34" charset="-120"/>
+              </a:rPr>
+              <a:t> (1888), último capítulo, grafia da edição.</a:t>
             </a:r>
             <a:endParaRPr lang="en-US" sz="1200" dirty="0"/>
           </a:p>
@@ -4936,7 +5156,35 @@
                 <a:ea typeface="Arial" pitchFamily="34" charset="-122"/>
                 <a:cs typeface="Arial" pitchFamily="34" charset="-120"/>
               </a:rPr>
-              <a:t>Eça de Queirós, Os Maias (1888), último capítulo, grafia da edição.</a:t>
+              <a:t>Eça de Queirós, </a:t>
+            </a:r>
+            <a:pPr indent="0" marL="0">
+              <a:buNone/>
+            </a:pPr>
+            <a:r>
+              <a:rPr lang="en-US" sz="1200" i="1" dirty="0">
+                <a:solidFill>
+                  <a:srgbClr val="A9A79F"/>
+                </a:solidFill>
+                <a:latin typeface="Arial" pitchFamily="34" charset="0"/>
+                <a:ea typeface="Arial" pitchFamily="34" charset="-122"/>
+                <a:cs typeface="Arial" pitchFamily="34" charset="-120"/>
+              </a:rPr>
+              <a:t>Os Maias</a:t>
+            </a:r>
+            <a:pPr indent="0" marL="0">
+              <a:buNone/>
+            </a:pPr>
+            <a:r>
+              <a:rPr lang="en-US" sz="1200" dirty="0">
+                <a:solidFill>
+                  <a:srgbClr val="A9A79F"/>
+                </a:solidFill>
+                <a:latin typeface="Arial" pitchFamily="34" charset="0"/>
+                <a:ea typeface="Arial" pitchFamily="34" charset="-122"/>
+                <a:cs typeface="Arial" pitchFamily="34" charset="-120"/>
+              </a:rPr>
+              <a:t> (1888), último capítulo, grafia da edição.</a:t>
             </a:r>
             <a:endParaRPr lang="en-US" sz="1200" dirty="0"/>
           </a:p>
@@ -5343,7 +5591,41 @@
                 <a:ea typeface="Arial" pitchFamily="34" charset="-122"/>
                 <a:cs typeface="Arial" pitchFamily="34" charset="-120"/>
               </a:rPr>
-              <a:t>Em Os Maias (1888), de Eça de Queirós, a casa do Ramalhete, em Lisboa, recebe os Maias no outono de 1875 e abre e fecha o romance.</a:t>
+              <a:t>Em </a:t>
+            </a:r>
+            <a:pPr indent="0" marL="0">
+              <a:lnSpc>
+                <a:spcPct val="105000"/>
+              </a:lnSpc>
+              <a:buNone/>
+            </a:pPr>
+            <a:r>
+              <a:rPr lang="en-US" sz="2200" i="1" dirty="0">
+                <a:solidFill>
+                  <a:srgbClr val="F2F0EA"/>
+                </a:solidFill>
+                <a:latin typeface="Arial" pitchFamily="34" charset="0"/>
+                <a:ea typeface="Arial" pitchFamily="34" charset="-122"/>
+                <a:cs typeface="Arial" pitchFamily="34" charset="-120"/>
+              </a:rPr>
+              <a:t>Os Maias</a:t>
+            </a:r>
+            <a:pPr indent="0" marL="0">
+              <a:lnSpc>
+                <a:spcPct val="105000"/>
+              </a:lnSpc>
+              <a:buNone/>
+            </a:pPr>
+            <a:r>
+              <a:rPr lang="en-US" sz="2200" dirty="0">
+                <a:solidFill>
+                  <a:srgbClr val="F2F0EA"/>
+                </a:solidFill>
+                <a:latin typeface="Arial" pitchFamily="34" charset="0"/>
+                <a:ea typeface="Arial" pitchFamily="34" charset="-122"/>
+                <a:cs typeface="Arial" pitchFamily="34" charset="-120"/>
+              </a:rPr>
+              <a:t> (1888), de Eça de Queirós, a casa do Ramalhete, em Lisboa, recebe os Maias no outono de 1875 e abre e fecha o romance.</a:t>
             </a:r>
             <a:endParaRPr lang="en-US" sz="2200" dirty="0"/>
           </a:p>
